--- a/assets/memos/B4-memo.pptx
+++ b/assets/memos/B4-memo.pptx
@@ -3105,8 +3105,8 @@
         </p:nvSpPr>
         <p:spPr>
           <a:xfrm>
-            <a:off x="648000" y="1180800"/>
-            <a:ext cx="5058000" cy="511200"/>
+            <a:off x="532800" y="1180800"/>
+            <a:ext cx="6490800" cy="511200"/>
           </a:xfrm>
           <a:prstGeom prst="rect">
             <a:avLst/>
@@ -3128,7 +3128,7 @@
               </a:spcAft>
             </a:pPr>
             <a:r>
-              <a:rPr sz="2000" b="1" i="0">
+              <a:rPr sz="1800" b="1" i="0">
                 <a:solidFill>
                   <a:srgbClr val="4388BC"/>
                 </a:solidFill>
@@ -4562,8 +4562,8 @@
         </p:nvSpPr>
         <p:spPr>
           <a:xfrm>
-            <a:off x="648000" y="1180800"/>
-            <a:ext cx="5058000" cy="511200"/>
+            <a:off x="532800" y="1180800"/>
+            <a:ext cx="6490800" cy="511200"/>
           </a:xfrm>
           <a:prstGeom prst="rect">
             <a:avLst/>
@@ -4585,7 +4585,7 @@
               </a:spcAft>
             </a:pPr>
             <a:r>
-              <a:rPr sz="2000" b="1" i="0">
+              <a:rPr sz="1800" b="1" i="0">
                 <a:solidFill>
                   <a:srgbClr val="4388BC"/>
                 </a:solidFill>

--- a/assets/memos/B4-memo.pptx
+++ b/assets/memos/B4-memo.pptx
@@ -3153,7 +3153,7 @@
                 </a:solidFill>
                 <a:latin typeface="Arial"/>
               </a:rPr>
-              <a:t>Pourquoi les démarches en ligne semblent comp… | Service-public.fr : votre portail officiel | Comment naviguer sur service-public.fr</a:t>
+              <a:t>Pourquoi les démarches en ligne semblent compliquées | Service-public.fr : votre portail officiel | Comment naviguer sur service-public.fr</a:t>
             </a:r>
           </a:p>
         </p:txBody>
@@ -3360,7 +3360,7 @@
                 </a:solidFill>
                 <a:latin typeface="Arial"/>
               </a:rPr>
-              <a:t>Pourquoi les démarches en ligne semblent comp…</a:t>
+              <a:t>Pourquoi les démarches en ligne semblent compliquées</a:t>
             </a:r>
           </a:p>
         </p:txBody>
@@ -3402,7 +3402,7 @@
                 </a:solidFill>
                 <a:latin typeface="Arial"/>
               </a:rPr>
-              <a:t>→ Beaucoup de personnes hésitent à effectuer leurs démarches admini…</a:t>
+              <a:t>→ Beaucoup de personnes hésitent à effectuer leurs démarches administratives en ligne. Et c'est tout à fait normal ! Les sites sont nombreux, les formulaires parfois longs, et la peur de faire une erreur peut bloquer.</a:t>
             </a:r>
           </a:p>
           <a:p>
@@ -3440,7 +3440,7 @@
                 </a:solidFill>
                 <a:latin typeface="Arial"/>
               </a:rPr>
-              <a:t>→ impots.gouv.fr, ameli.fr, caf.fr, service-public.fr On ne sait pl…</a:t>
+              <a:t>→ impots.gouv.fr, ameli.fr, caf.fr, service-public.fr On ne sait plus où aller en premier.</a:t>
             </a:r>
           </a:p>
           <a:p>
@@ -3708,7 +3708,7 @@
                 </a:solidFill>
                 <a:latin typeface="Arial"/>
               </a:rPr>
-              <a:t>→ Service-public.fr est le site officiel de l'administration frança…</a:t>
+              <a:t>→ Service-public.fr est le site officiel de l'administration française. Géré par la Direction de l'information légale et administrative (DILA), c'est votre point d'entrée unique et fiable pour toutes vos démarches. Il remplace les longues files d'attente en préfecture ou en mairie.</a:t>
             </a:r>
           </a:p>
           <a:p>
@@ -3746,7 +3746,7 @@
                 </a:solidFill>
                 <a:latin typeface="Arial"/>
               </a:rPr>
-              <a:t>→ Fiches pratiques claires sur vos droits et obligations, rédigées …</a:t>
+              <a:t>→ Fiches pratiques claires sur vos droits et obligations, rédigées en langage accessible.</a:t>
             </a:r>
           </a:p>
           <a:p>
@@ -4014,7 +4014,7 @@
                 </a:solidFill>
                 <a:latin typeface="Arial"/>
               </a:rPr>
-              <a:t>→ Le site est organisé de manière logique. Voici comment l'utiliser…</a:t>
+              <a:t>→ Le site est organisé de manière logique. Voici comment l'utiliser efficacement, étape par étape, même si vous n'êtes pas à l'aise avec Internet.</a:t>
             </a:r>
           </a:p>
           <a:p>
@@ -4320,7 +4320,7 @@
                 </a:solidFill>
                 <a:latin typeface="Arial"/>
               </a:rPr>
-              <a:t>→ boussole.jeunes.gouv.fr est un outil numérique gratuit conçu spéc…</a:t>
+              <a:t>→ boussole.jeunes.gouv.fr est un outil numérique gratuit conçu spécifiquement pour aider les jeunes de 16 à 30 ans à s'orienter dans leurs démarches administratives, sociales et professionnelles. En quelques questions simples, il vous dirige vers les aides et dispositifs qui correspondent à votre situation.</a:t>
             </a:r>
           </a:p>
           <a:p>
@@ -4358,7 +4358,7 @@
                 </a:solidFill>
                 <a:latin typeface="Arial"/>
               </a:rPr>
-              <a:t>→ Découvrez les aides au logement, les bourses, le RSA jeunes, la G…</a:t>
+              <a:t>→ Découvrez les aides au logement, les bourses, le RSA jeunes, la Garantie Jeunes et bien d'autres dispositifs selon votre profil.</a:t>
             </a:r>
           </a:p>
           <a:p>
@@ -4462,7 +4462,7 @@
                 </a:solidFill>
                 <a:latin typeface="Arial"/>
               </a:rPr>
-              <a:t>→ Suite en page 2 : FranceConnect : une clé pour tous les service… | Les principaux sites par thème | Vous n'êtes pas seule : les lieux d'aide</a:t>
+              <a:t>→ Suite en page 2 : FranceConnect : une clé pour tous les services | Les principaux sites par thème | Vous n'êtes pas seule : les lieux d'aide</a:t>
             </a:r>
           </a:p>
           <a:p>
@@ -4610,7 +4610,7 @@
                 </a:solidFill>
                 <a:latin typeface="Arial"/>
               </a:rPr>
-              <a:t>Pourquoi les démarches en ligne semblent comp… | Service-public.fr : votre portail officiel | Comment naviguer sur service-public.fr</a:t>
+              <a:t>Pourquoi les démarches en ligne semblent compliquées | Service-public.fr : votre portail officiel | Comment naviguer sur service-public.fr</a:t>
             </a:r>
           </a:p>
         </p:txBody>
@@ -4817,7 +4817,7 @@
                 </a:solidFill>
                 <a:latin typeface="Arial"/>
               </a:rPr>
-              <a:t>FranceConnect : une clé pour tous les service…</a:t>
+              <a:t>FranceConnect : une clé pour tous les services</a:t>
             </a:r>
           </a:p>
         </p:txBody>
@@ -4859,7 +4859,7 @@
                 </a:solidFill>
                 <a:latin typeface="Arial"/>
               </a:rPr>
-              <a:t>→ FranceConnect est un dispositif officiel de l'État qui vous perme…</a:t>
+              <a:t>→ FranceConnect est un dispositif officiel de l'État qui vous permet de vous connecter à la majorité des services publics en ligne avec un seul identifiant. Plus besoin de retenir des dizaines de mots de passe différents !</a:t>
             </a:r>
           </a:p>
           <a:p>
@@ -5165,7 +5165,7 @@
                 </a:solidFill>
                 <a:latin typeface="Arial"/>
               </a:rPr>
-              <a:t>→ Voici un panorama des sites officiels les plus utiles au quotidie…</a:t>
+              <a:t>→ Voici un panorama des sites officiels les plus utiles au quotidien. Tous sont gratuits et accessibles depuis un ordinateur, une tablette ou un smartphone.</a:t>
             </a:r>
           </a:p>
           <a:p>
@@ -5184,7 +5184,7 @@
                 </a:solidFill>
                 <a:latin typeface="Arial"/>
               </a:rPr>
-              <a:t>→ impots.gouv.fr — Déclaration de revenus, paiement, simulation d'i…</a:t>
+              <a:t>→ impots.gouv.fr — Déclaration de revenus, paiement, simulation d'impôt, remboursements. Accessible via FranceConnect.</a:t>
             </a:r>
           </a:p>
           <a:p>
@@ -5203,7 +5203,7 @@
                 </a:solidFill>
                 <a:latin typeface="Arial"/>
               </a:rPr>
-              <a:t>→ ameli.fr — Remboursements, carte vitale, arrêts de travail, médec…</a:t>
+              <a:t>→ ameli.fr — Remboursements, carte vitale, arrêts de travail, médecin traitant. Votre espace personnel Ameli.</a:t>
             </a:r>
           </a:p>
           <a:p>
@@ -5471,7 +5471,7 @@
                 </a:solidFill>
                 <a:latin typeface="Arial"/>
               </a:rPr>
-              <a:t>→ Effectuer des démarches en ligne ne veut pas dire être seul face …</a:t>
+              <a:t>→ Effectuer des démarches en ligne ne veut pas dire être seul face à l'écran. De nombreux professionnels et bénévoles sont là pour vous accompagner, gratuitement, près de chez vous.</a:t>
             </a:r>
           </a:p>
           <a:p>
@@ -5509,7 +5509,7 @@
                 </a:solidFill>
                 <a:latin typeface="Arial"/>
               </a:rPr>
-              <a:t>→ Un réseau de plus de 2 700 espaces en France où des agents formés…</a:t>
+              <a:t>→ Un réseau de plus de 2 700 espaces en France où des agents formés vous aident à réaliser toutes vos démarches administratives en ligne, gratuitement. Disponible en zones urbaines et rurales.</a:t>
             </a:r>
           </a:p>
           <a:p>

--- a/assets/memos/B4-memo.pptx
+++ b/assets/memos/B4-memo.pptx
@@ -3167,7 +3167,7 @@
         <p:spPr>
           <a:xfrm>
             <a:off x="532800" y="1749600"/>
-            <a:ext cx="6490800" cy="1371600"/>
+            <a:ext cx="6490800" cy="1684800"/>
           </a:xfrm>
           <a:prstGeom prst="rect">
             <a:avLst/>
@@ -3208,7 +3208,7 @@
         <p:spPr>
           <a:xfrm>
             <a:off x="532800" y="1749600"/>
-            <a:ext cx="572400" cy="1371600"/>
+            <a:ext cx="572400" cy="1684800"/>
           </a:xfrm>
           <a:prstGeom prst="rect">
             <a:avLst/>
@@ -3374,7 +3374,7 @@
         <p:spPr>
           <a:xfrm>
             <a:off x="1159200" y="2214000"/>
-            <a:ext cx="5828400" cy="885600"/>
+            <a:ext cx="5828400" cy="1184399"/>
           </a:xfrm>
           <a:prstGeom prst="rect">
             <a:avLst/>
@@ -3472,8 +3472,8 @@
         </p:nvSpPr>
         <p:spPr>
           <a:xfrm>
-            <a:off x="532800" y="3186000"/>
-            <a:ext cx="6490800" cy="1371600"/>
+            <a:off x="532800" y="3499199"/>
+            <a:ext cx="6490800" cy="1835999"/>
           </a:xfrm>
           <a:prstGeom prst="rect">
             <a:avLst/>
@@ -3513,8 +3513,8 @@
         </p:nvSpPr>
         <p:spPr>
           <a:xfrm>
-            <a:off x="532800" y="3186000"/>
-            <a:ext cx="572400" cy="1371600"/>
+            <a:off x="532800" y="3499199"/>
+            <a:ext cx="572400" cy="1835999"/>
           </a:xfrm>
           <a:prstGeom prst="rect">
             <a:avLst/>
@@ -3554,7 +3554,7 @@
         </p:nvSpPr>
         <p:spPr>
           <a:xfrm>
-            <a:off x="1206000" y="3607200"/>
+            <a:off x="1206000" y="3920399"/>
             <a:ext cx="5752800" cy="7200"/>
           </a:xfrm>
           <a:prstGeom prst="rect">
@@ -3595,7 +3595,7 @@
         </p:nvSpPr>
         <p:spPr>
           <a:xfrm>
-            <a:off x="532800" y="3252600"/>
+            <a:off x="532800" y="3565800"/>
             <a:ext cx="572400" cy="288000"/>
           </a:xfrm>
           <a:prstGeom prst="rect">
@@ -3637,7 +3637,7 @@
         </p:nvSpPr>
         <p:spPr>
           <a:xfrm>
-            <a:off x="1177200" y="3221999"/>
+            <a:off x="1177200" y="3535199"/>
             <a:ext cx="5810400" cy="370799"/>
           </a:xfrm>
           <a:prstGeom prst="rect">
@@ -3679,8 +3679,8 @@
         </p:nvSpPr>
         <p:spPr>
           <a:xfrm>
-            <a:off x="1159200" y="3650399"/>
-            <a:ext cx="5828400" cy="885600"/>
+            <a:off x="1159200" y="3963599"/>
+            <a:ext cx="5828400" cy="1335599"/>
           </a:xfrm>
           <a:prstGeom prst="rect">
             <a:avLst/>
@@ -3778,8 +3778,8 @@
         </p:nvSpPr>
         <p:spPr>
           <a:xfrm>
-            <a:off x="532800" y="4622400"/>
-            <a:ext cx="6490800" cy="1371600"/>
+            <a:off x="532800" y="5399999"/>
+            <a:ext cx="6490800" cy="1382400"/>
           </a:xfrm>
           <a:prstGeom prst="rect">
             <a:avLst/>
@@ -3819,8 +3819,8 @@
         </p:nvSpPr>
         <p:spPr>
           <a:xfrm>
-            <a:off x="532800" y="4622400"/>
-            <a:ext cx="572400" cy="1371600"/>
+            <a:off x="532800" y="5399999"/>
+            <a:ext cx="572400" cy="1382400"/>
           </a:xfrm>
           <a:prstGeom prst="rect">
             <a:avLst/>
@@ -3860,7 +3860,7 @@
         </p:nvSpPr>
         <p:spPr>
           <a:xfrm>
-            <a:off x="1206000" y="5043600"/>
+            <a:off x="1206000" y="5821199"/>
             <a:ext cx="5752800" cy="7200"/>
           </a:xfrm>
           <a:prstGeom prst="rect">
@@ -3901,7 +3901,7 @@
         </p:nvSpPr>
         <p:spPr>
           <a:xfrm>
-            <a:off x="532800" y="4689000"/>
+            <a:off x="532800" y="5466600"/>
             <a:ext cx="572400" cy="288000"/>
           </a:xfrm>
           <a:prstGeom prst="rect">
@@ -3943,7 +3943,7 @@
         </p:nvSpPr>
         <p:spPr>
           <a:xfrm>
-            <a:off x="1177200" y="4658400"/>
+            <a:off x="1177200" y="5435999"/>
             <a:ext cx="5810400" cy="370799"/>
           </a:xfrm>
           <a:prstGeom prst="rect">
@@ -3985,8 +3985,8 @@
         </p:nvSpPr>
         <p:spPr>
           <a:xfrm>
-            <a:off x="1159200" y="5086800"/>
-            <a:ext cx="5828400" cy="885600"/>
+            <a:off x="1159200" y="5864400"/>
+            <a:ext cx="5828400" cy="881999"/>
           </a:xfrm>
           <a:prstGeom prst="rect">
             <a:avLst/>
@@ -4079,312 +4079,6 @@
       <p:sp>
         <p:nvSpPr>
           <p:cNvPr id="21" name="Rectangle 20"/>
-          <p:cNvSpPr/>
-          <p:nvPr/>
-        </p:nvSpPr>
-        <p:spPr>
-          <a:xfrm>
-            <a:off x="532800" y="6058799"/>
-            <a:ext cx="6490800" cy="1371600"/>
-          </a:xfrm>
-          <a:prstGeom prst="rect">
-            <a:avLst/>
-          </a:prstGeom>
-          <a:solidFill>
-            <a:srgbClr val="EBF7F6"/>
-          </a:solidFill>
-          <a:ln>
-            <a:noFill/>
-          </a:ln>
-        </p:spPr>
-        <p:style>
-          <a:lnRef idx="1">
-            <a:schemeClr val="accent1"/>
-          </a:lnRef>
-          <a:fillRef idx="3">
-            <a:schemeClr val="accent1"/>
-          </a:fillRef>
-          <a:effectRef idx="2">
-            <a:schemeClr val="accent1"/>
-          </a:effectRef>
-          <a:fontRef idx="minor">
-            <a:schemeClr val="lt1"/>
-          </a:fontRef>
-        </p:style>
-        <p:txBody>
-          <a:bodyPr rtlCol="0" anchor="ctr"/>
-          <a:lstStyle/>
-          <a:p/>
-        </p:txBody>
-      </p:sp>
-      <p:sp>
-        <p:nvSpPr>
-          <p:cNvPr id="22" name="Rectangle 21"/>
-          <p:cNvSpPr/>
-          <p:nvPr/>
-        </p:nvSpPr>
-        <p:spPr>
-          <a:xfrm>
-            <a:off x="532800" y="6058799"/>
-            <a:ext cx="572400" cy="1371600"/>
-          </a:xfrm>
-          <a:prstGeom prst="rect">
-            <a:avLst/>
-          </a:prstGeom>
-          <a:solidFill>
-            <a:srgbClr val="187C88"/>
-          </a:solidFill>
-          <a:ln>
-            <a:noFill/>
-          </a:ln>
-        </p:spPr>
-        <p:style>
-          <a:lnRef idx="1">
-            <a:schemeClr val="accent1"/>
-          </a:lnRef>
-          <a:fillRef idx="3">
-            <a:schemeClr val="accent1"/>
-          </a:fillRef>
-          <a:effectRef idx="2">
-            <a:schemeClr val="accent1"/>
-          </a:effectRef>
-          <a:fontRef idx="minor">
-            <a:schemeClr val="lt1"/>
-          </a:fontRef>
-        </p:style>
-        <p:txBody>
-          <a:bodyPr rtlCol="0" anchor="ctr"/>
-          <a:lstStyle/>
-          <a:p/>
-        </p:txBody>
-      </p:sp>
-      <p:sp>
-        <p:nvSpPr>
-          <p:cNvPr id="23" name="Rectangle 22"/>
-          <p:cNvSpPr/>
-          <p:nvPr/>
-        </p:nvSpPr>
-        <p:spPr>
-          <a:xfrm>
-            <a:off x="1206000" y="6480000"/>
-            <a:ext cx="5752800" cy="7200"/>
-          </a:xfrm>
-          <a:prstGeom prst="rect">
-            <a:avLst/>
-          </a:prstGeom>
-          <a:solidFill>
-            <a:srgbClr val="DDDDDD"/>
-          </a:solidFill>
-          <a:ln>
-            <a:noFill/>
-          </a:ln>
-        </p:spPr>
-        <p:style>
-          <a:lnRef idx="1">
-            <a:schemeClr val="accent1"/>
-          </a:lnRef>
-          <a:fillRef idx="3">
-            <a:schemeClr val="accent1"/>
-          </a:fillRef>
-          <a:effectRef idx="2">
-            <a:schemeClr val="accent1"/>
-          </a:effectRef>
-          <a:fontRef idx="minor">
-            <a:schemeClr val="lt1"/>
-          </a:fontRef>
-        </p:style>
-        <p:txBody>
-          <a:bodyPr rtlCol="0" anchor="ctr"/>
-          <a:lstStyle/>
-          <a:p/>
-        </p:txBody>
-      </p:sp>
-      <p:sp>
-        <p:nvSpPr>
-          <p:cNvPr id="24" name="TextBox 23"/>
-          <p:cNvSpPr txBox="1"/>
-          <p:nvPr/>
-        </p:nvSpPr>
-        <p:spPr>
-          <a:xfrm>
-            <a:off x="532800" y="6125399"/>
-            <a:ext cx="572400" cy="288000"/>
-          </a:xfrm>
-          <a:prstGeom prst="rect">
-            <a:avLst/>
-          </a:prstGeom>
-          <a:noFill/>
-        </p:spPr>
-        <p:txBody>
-          <a:bodyPr wrap="square" tIns="0" bIns="0" lIns="18000" rIns="18000">
-            <a:spAutoFit/>
-          </a:bodyPr>
-          <a:lstStyle/>
-          <a:p>
-            <a:pPr algn="ctr">
-              <a:spcBef>
-                <a:spcPts val="0"/>
-              </a:spcBef>
-              <a:spcAft>
-                <a:spcPts val="100"/>
-              </a:spcAft>
-            </a:pPr>
-            <a:r>
-              <a:rPr sz="2200" b="1" i="0">
-                <a:solidFill>
-                  <a:srgbClr val="FFFFFF"/>
-                </a:solidFill>
-                <a:latin typeface="Arial"/>
-              </a:rPr>
-              <a:t>4</a:t>
-            </a:r>
-          </a:p>
-        </p:txBody>
-      </p:sp>
-      <p:sp>
-        <p:nvSpPr>
-          <p:cNvPr id="25" name="TextBox 24"/>
-          <p:cNvSpPr txBox="1"/>
-          <p:nvPr/>
-        </p:nvSpPr>
-        <p:spPr>
-          <a:xfrm>
-            <a:off x="1177200" y="6094800"/>
-            <a:ext cx="5810400" cy="370799"/>
-          </a:xfrm>
-          <a:prstGeom prst="rect">
-            <a:avLst/>
-          </a:prstGeom>
-          <a:noFill/>
-        </p:spPr>
-        <p:txBody>
-          <a:bodyPr wrap="square" tIns="0" bIns="0" lIns="18000" rIns="18000">
-            <a:spAutoFit/>
-          </a:bodyPr>
-          <a:lstStyle/>
-          <a:p>
-            <a:pPr algn="l">
-              <a:spcBef>
-                <a:spcPts val="0"/>
-              </a:spcBef>
-              <a:spcAft>
-                <a:spcPts val="100"/>
-              </a:spcAft>
-            </a:pPr>
-            <a:r>
-              <a:rPr sz="1100" b="1" i="0">
-                <a:solidFill>
-                  <a:srgbClr val="187C88"/>
-                </a:solidFill>
-                <a:latin typeface="Arial"/>
-              </a:rPr>
-              <a:t>La Boussole des jeunes : pour les 16–30 ans</a:t>
-            </a:r>
-          </a:p>
-        </p:txBody>
-      </p:sp>
-      <p:sp>
-        <p:nvSpPr>
-          <p:cNvPr id="26" name="TextBox 25"/>
-          <p:cNvSpPr txBox="1"/>
-          <p:nvPr/>
-        </p:nvSpPr>
-        <p:spPr>
-          <a:xfrm>
-            <a:off x="1159200" y="6523200"/>
-            <a:ext cx="5828400" cy="885600"/>
-          </a:xfrm>
-          <a:prstGeom prst="rect">
-            <a:avLst/>
-          </a:prstGeom>
-          <a:noFill/>
-        </p:spPr>
-        <p:txBody>
-          <a:bodyPr wrap="square" tIns="0" bIns="0" lIns="18000" rIns="18000">
-            <a:spAutoFit/>
-          </a:bodyPr>
-          <a:lstStyle/>
-          <a:p>
-            <a:pPr algn="l">
-              <a:spcBef>
-                <a:spcPts val="0"/>
-              </a:spcBef>
-              <a:spcAft>
-                <a:spcPts val="100"/>
-              </a:spcAft>
-            </a:pPr>
-            <a:r>
-              <a:rPr sz="1000" b="0" i="0">
-                <a:solidFill>
-                  <a:srgbClr val="2B2B2B"/>
-                </a:solidFill>
-                <a:latin typeface="Arial"/>
-              </a:rPr>
-              <a:t>→ boussole.jeunes.gouv.fr est un outil numérique gratuit conçu spécifiquement pour aider les jeunes de 16 à 30 ans à s'orienter dans leurs démarches administratives, sociales et professionnelles. En quelques questions simples, il vous dirige vers les aides et dispositifs qui correspondent à votre situation.</a:t>
-            </a:r>
-          </a:p>
-          <a:p>
-            <a:pPr algn="l">
-              <a:spcBef>
-                <a:spcPts val="0"/>
-              </a:spcBef>
-              <a:spcAft>
-                <a:spcPts val="100"/>
-              </a:spcAft>
-            </a:pPr>
-            <a:r>
-              <a:rPr sz="1000" b="0" i="0">
-                <a:solidFill>
-                  <a:srgbClr val="2B2B2B"/>
-                </a:solidFill>
-                <a:latin typeface="Arial"/>
-              </a:rPr>
-              <a:t>→ Aides financières</a:t>
-            </a:r>
-          </a:p>
-          <a:p>
-            <a:pPr algn="l">
-              <a:spcBef>
-                <a:spcPts val="0"/>
-              </a:spcBef>
-              <a:spcAft>
-                <a:spcPts val="100"/>
-              </a:spcAft>
-            </a:pPr>
-            <a:r>
-              <a:rPr sz="1000" b="0" i="0">
-                <a:solidFill>
-                  <a:srgbClr val="2B2B2B"/>
-                </a:solidFill>
-                <a:latin typeface="Arial"/>
-              </a:rPr>
-              <a:t>→ Découvrez les aides au logement, les bourses, le RSA jeunes, la Garantie Jeunes et bien d'autres dispositifs selon votre profil.</a:t>
-            </a:r>
-          </a:p>
-          <a:p>
-            <a:pPr algn="l">
-              <a:spcBef>
-                <a:spcPts val="0"/>
-              </a:spcBef>
-              <a:spcAft>
-                <a:spcPts val="100"/>
-              </a:spcAft>
-            </a:pPr>
-            <a:r>
-              <a:rPr sz="1000" b="0" i="0">
-                <a:solidFill>
-                  <a:srgbClr val="2B2B2B"/>
-                </a:solidFill>
-                <a:latin typeface="Arial"/>
-              </a:rPr>
-              <a:t>→ Emploi &amp; formation</a:t>
-            </a:r>
-          </a:p>
-        </p:txBody>
-      </p:sp>
-      <p:sp>
-        <p:nvSpPr>
-          <p:cNvPr id="27" name="Rectangle 26"/>
           <p:cNvSpPr/>
           <p:nvPr/>
         </p:nvSpPr>
@@ -4427,7 +4121,7 @@
       </p:sp>
       <p:sp>
         <p:nvSpPr>
-          <p:cNvPr id="28" name="TextBox 27"/>
+          <p:cNvPr id="22" name="TextBox 21"/>
           <p:cNvSpPr txBox="1"/>
           <p:nvPr/>
         </p:nvSpPr>
@@ -4462,7 +4156,7 @@
                 </a:solidFill>
                 <a:latin typeface="Arial"/>
               </a:rPr>
-              <a:t>→ Suite en page 2 : FranceConnect : une clé pour tous les services | Les principaux sites par thème | Vous n'êtes pas seule : les lieux d'aide</a:t>
+              <a:t>→ Suite en page 2 : La Boussole des jeunes : pour les 16–30 ans | FranceConnect : une clé pour tous les services | Les principaux sites par thème</a:t>
             </a:r>
           </a:p>
           <a:p>
@@ -4488,7 +4182,7 @@
       </p:sp>
       <p:sp>
         <p:nvSpPr>
-          <p:cNvPr id="29" name="TextBox 28"/>
+          <p:cNvPr id="23" name="TextBox 22"/>
           <p:cNvSpPr txBox="1"/>
           <p:nvPr/>
         </p:nvSpPr>
@@ -4624,7 +4318,313 @@
         <p:spPr>
           <a:xfrm>
             <a:off x="532800" y="1749600"/>
-            <a:ext cx="6490800" cy="1371600"/>
+            <a:ext cx="6490800" cy="1835999"/>
+          </a:xfrm>
+          <a:prstGeom prst="rect">
+            <a:avLst/>
+          </a:prstGeom>
+          <a:solidFill>
+            <a:srgbClr val="EBF7F6"/>
+          </a:solidFill>
+          <a:ln>
+            <a:noFill/>
+          </a:ln>
+        </p:spPr>
+        <p:style>
+          <a:lnRef idx="1">
+            <a:schemeClr val="accent1"/>
+          </a:lnRef>
+          <a:fillRef idx="3">
+            <a:schemeClr val="accent1"/>
+          </a:fillRef>
+          <a:effectRef idx="2">
+            <a:schemeClr val="accent1"/>
+          </a:effectRef>
+          <a:fontRef idx="minor">
+            <a:schemeClr val="lt1"/>
+          </a:fontRef>
+        </p:style>
+        <p:txBody>
+          <a:bodyPr rtlCol="0" anchor="ctr"/>
+          <a:lstStyle/>
+          <a:p/>
+        </p:txBody>
+      </p:sp>
+      <p:sp>
+        <p:nvSpPr>
+          <p:cNvPr id="4" name="Rectangle 3"/>
+          <p:cNvSpPr/>
+          <p:nvPr/>
+        </p:nvSpPr>
+        <p:spPr>
+          <a:xfrm>
+            <a:off x="532800" y="1749600"/>
+            <a:ext cx="572400" cy="1835999"/>
+          </a:xfrm>
+          <a:prstGeom prst="rect">
+            <a:avLst/>
+          </a:prstGeom>
+          <a:solidFill>
+            <a:srgbClr val="187C88"/>
+          </a:solidFill>
+          <a:ln>
+            <a:noFill/>
+          </a:ln>
+        </p:spPr>
+        <p:style>
+          <a:lnRef idx="1">
+            <a:schemeClr val="accent1"/>
+          </a:lnRef>
+          <a:fillRef idx="3">
+            <a:schemeClr val="accent1"/>
+          </a:fillRef>
+          <a:effectRef idx="2">
+            <a:schemeClr val="accent1"/>
+          </a:effectRef>
+          <a:fontRef idx="minor">
+            <a:schemeClr val="lt1"/>
+          </a:fontRef>
+        </p:style>
+        <p:txBody>
+          <a:bodyPr rtlCol="0" anchor="ctr"/>
+          <a:lstStyle/>
+          <a:p/>
+        </p:txBody>
+      </p:sp>
+      <p:sp>
+        <p:nvSpPr>
+          <p:cNvPr id="5" name="Rectangle 4"/>
+          <p:cNvSpPr/>
+          <p:nvPr/>
+        </p:nvSpPr>
+        <p:spPr>
+          <a:xfrm>
+            <a:off x="1206000" y="2170800"/>
+            <a:ext cx="5752800" cy="7200"/>
+          </a:xfrm>
+          <a:prstGeom prst="rect">
+            <a:avLst/>
+          </a:prstGeom>
+          <a:solidFill>
+            <a:srgbClr val="DDDDDD"/>
+          </a:solidFill>
+          <a:ln>
+            <a:noFill/>
+          </a:ln>
+        </p:spPr>
+        <p:style>
+          <a:lnRef idx="1">
+            <a:schemeClr val="accent1"/>
+          </a:lnRef>
+          <a:fillRef idx="3">
+            <a:schemeClr val="accent1"/>
+          </a:fillRef>
+          <a:effectRef idx="2">
+            <a:schemeClr val="accent1"/>
+          </a:effectRef>
+          <a:fontRef idx="minor">
+            <a:schemeClr val="lt1"/>
+          </a:fontRef>
+        </p:style>
+        <p:txBody>
+          <a:bodyPr rtlCol="0" anchor="ctr"/>
+          <a:lstStyle/>
+          <a:p/>
+        </p:txBody>
+      </p:sp>
+      <p:sp>
+        <p:nvSpPr>
+          <p:cNvPr id="6" name="TextBox 5"/>
+          <p:cNvSpPr txBox="1"/>
+          <p:nvPr/>
+        </p:nvSpPr>
+        <p:spPr>
+          <a:xfrm>
+            <a:off x="532800" y="1816200"/>
+            <a:ext cx="572400" cy="288000"/>
+          </a:xfrm>
+          <a:prstGeom prst="rect">
+            <a:avLst/>
+          </a:prstGeom>
+          <a:noFill/>
+        </p:spPr>
+        <p:txBody>
+          <a:bodyPr wrap="square" tIns="0" bIns="0" lIns="18000" rIns="18000">
+            <a:spAutoFit/>
+          </a:bodyPr>
+          <a:lstStyle/>
+          <a:p>
+            <a:pPr algn="ctr">
+              <a:spcBef>
+                <a:spcPts val="0"/>
+              </a:spcBef>
+              <a:spcAft>
+                <a:spcPts val="100"/>
+              </a:spcAft>
+            </a:pPr>
+            <a:r>
+              <a:rPr sz="2200" b="1" i="0">
+                <a:solidFill>
+                  <a:srgbClr val="FFFFFF"/>
+                </a:solidFill>
+                <a:latin typeface="Arial"/>
+              </a:rPr>
+              <a:t>4</a:t>
+            </a:r>
+          </a:p>
+        </p:txBody>
+      </p:sp>
+      <p:sp>
+        <p:nvSpPr>
+          <p:cNvPr id="7" name="TextBox 6"/>
+          <p:cNvSpPr txBox="1"/>
+          <p:nvPr/>
+        </p:nvSpPr>
+        <p:spPr>
+          <a:xfrm>
+            <a:off x="1177200" y="1785600"/>
+            <a:ext cx="5810400" cy="370799"/>
+          </a:xfrm>
+          <a:prstGeom prst="rect">
+            <a:avLst/>
+          </a:prstGeom>
+          <a:noFill/>
+        </p:spPr>
+        <p:txBody>
+          <a:bodyPr wrap="square" tIns="0" bIns="0" lIns="18000" rIns="18000">
+            <a:spAutoFit/>
+          </a:bodyPr>
+          <a:lstStyle/>
+          <a:p>
+            <a:pPr algn="l">
+              <a:spcBef>
+                <a:spcPts val="0"/>
+              </a:spcBef>
+              <a:spcAft>
+                <a:spcPts val="100"/>
+              </a:spcAft>
+            </a:pPr>
+            <a:r>
+              <a:rPr sz="1100" b="1" i="0">
+                <a:solidFill>
+                  <a:srgbClr val="187C88"/>
+                </a:solidFill>
+                <a:latin typeface="Arial"/>
+              </a:rPr>
+              <a:t>La Boussole des jeunes : pour les 16–30 ans</a:t>
+            </a:r>
+          </a:p>
+        </p:txBody>
+      </p:sp>
+      <p:sp>
+        <p:nvSpPr>
+          <p:cNvPr id="8" name="TextBox 7"/>
+          <p:cNvSpPr txBox="1"/>
+          <p:nvPr/>
+        </p:nvSpPr>
+        <p:spPr>
+          <a:xfrm>
+            <a:off x="1159200" y="2214000"/>
+            <a:ext cx="5828400" cy="1335599"/>
+          </a:xfrm>
+          <a:prstGeom prst="rect">
+            <a:avLst/>
+          </a:prstGeom>
+          <a:noFill/>
+        </p:spPr>
+        <p:txBody>
+          <a:bodyPr wrap="square" tIns="0" bIns="0" lIns="18000" rIns="18000">
+            <a:spAutoFit/>
+          </a:bodyPr>
+          <a:lstStyle/>
+          <a:p>
+            <a:pPr algn="l">
+              <a:spcBef>
+                <a:spcPts val="0"/>
+              </a:spcBef>
+              <a:spcAft>
+                <a:spcPts val="100"/>
+              </a:spcAft>
+            </a:pPr>
+            <a:r>
+              <a:rPr sz="1000" b="0" i="0">
+                <a:solidFill>
+                  <a:srgbClr val="2B2B2B"/>
+                </a:solidFill>
+                <a:latin typeface="Arial"/>
+              </a:rPr>
+              <a:t>→ boussole.jeunes.gouv.fr est un outil numérique gratuit conçu spécifiquement pour aider les jeunes de 16 à 30 ans à s'orienter dans leurs démarches administratives, sociales et professionnelles. En quelques questions simples, il vous dirige vers les aides et dispositifs qui correspondent à votre situation.</a:t>
+            </a:r>
+          </a:p>
+          <a:p>
+            <a:pPr algn="l">
+              <a:spcBef>
+                <a:spcPts val="0"/>
+              </a:spcBef>
+              <a:spcAft>
+                <a:spcPts val="100"/>
+              </a:spcAft>
+            </a:pPr>
+            <a:r>
+              <a:rPr sz="1000" b="0" i="0">
+                <a:solidFill>
+                  <a:srgbClr val="2B2B2B"/>
+                </a:solidFill>
+                <a:latin typeface="Arial"/>
+              </a:rPr>
+              <a:t>→ Aides financières</a:t>
+            </a:r>
+          </a:p>
+          <a:p>
+            <a:pPr algn="l">
+              <a:spcBef>
+                <a:spcPts val="0"/>
+              </a:spcBef>
+              <a:spcAft>
+                <a:spcPts val="100"/>
+              </a:spcAft>
+            </a:pPr>
+            <a:r>
+              <a:rPr sz="1000" b="0" i="0">
+                <a:solidFill>
+                  <a:srgbClr val="2B2B2B"/>
+                </a:solidFill>
+                <a:latin typeface="Arial"/>
+              </a:rPr>
+              <a:t>→ Découvrez les aides au logement, les bourses, le RSA jeunes, la Garantie Jeunes et bien d'autres dispositifs selon votre profil.</a:t>
+            </a:r>
+          </a:p>
+          <a:p>
+            <a:pPr algn="l">
+              <a:spcBef>
+                <a:spcPts val="0"/>
+              </a:spcBef>
+              <a:spcAft>
+                <a:spcPts val="100"/>
+              </a:spcAft>
+            </a:pPr>
+            <a:r>
+              <a:rPr sz="1000" b="0" i="0">
+                <a:solidFill>
+                  <a:srgbClr val="2B2B2B"/>
+                </a:solidFill>
+                <a:latin typeface="Arial"/>
+              </a:rPr>
+              <a:t>→ Emploi &amp; formation</a:t>
+            </a:r>
+          </a:p>
+        </p:txBody>
+      </p:sp>
+      <p:sp>
+        <p:nvSpPr>
+          <p:cNvPr id="9" name="Rectangle 8"/>
+          <p:cNvSpPr/>
+          <p:nvPr/>
+        </p:nvSpPr>
+        <p:spPr>
+          <a:xfrm>
+            <a:off x="532800" y="3650400"/>
+            <a:ext cx="6490800" cy="1533600"/>
           </a:xfrm>
           <a:prstGeom prst="rect">
             <a:avLst/>
@@ -4658,14 +4658,14 @@
       </p:sp>
       <p:sp>
         <p:nvSpPr>
-          <p:cNvPr id="4" name="Rectangle 3"/>
+          <p:cNvPr id="10" name="Rectangle 9"/>
           <p:cNvSpPr/>
           <p:nvPr/>
         </p:nvSpPr>
         <p:spPr>
           <a:xfrm>
-            <a:off x="532800" y="1749600"/>
-            <a:ext cx="572400" cy="1371600"/>
+            <a:off x="532800" y="3650400"/>
+            <a:ext cx="572400" cy="1533600"/>
           </a:xfrm>
           <a:prstGeom prst="rect">
             <a:avLst/>
@@ -4699,13 +4699,13 @@
       </p:sp>
       <p:sp>
         <p:nvSpPr>
-          <p:cNvPr id="5" name="Rectangle 4"/>
+          <p:cNvPr id="11" name="Rectangle 10"/>
           <p:cNvSpPr/>
           <p:nvPr/>
         </p:nvSpPr>
         <p:spPr>
           <a:xfrm>
-            <a:off x="1206000" y="2170800"/>
+            <a:off x="1206000" y="4071600"/>
             <a:ext cx="5752800" cy="7200"/>
           </a:xfrm>
           <a:prstGeom prst="rect">
@@ -4740,13 +4740,13 @@
       </p:sp>
       <p:sp>
         <p:nvSpPr>
-          <p:cNvPr id="6" name="TextBox 5"/>
+          <p:cNvPr id="12" name="TextBox 11"/>
           <p:cNvSpPr txBox="1"/>
           <p:nvPr/>
         </p:nvSpPr>
         <p:spPr>
           <a:xfrm>
-            <a:off x="532800" y="1816200"/>
+            <a:off x="532800" y="3717000"/>
             <a:ext cx="572400" cy="288000"/>
           </a:xfrm>
           <a:prstGeom prst="rect">
@@ -4782,13 +4782,13 @@
       </p:sp>
       <p:sp>
         <p:nvSpPr>
-          <p:cNvPr id="7" name="TextBox 6"/>
+          <p:cNvPr id="13" name="TextBox 12"/>
           <p:cNvSpPr txBox="1"/>
           <p:nvPr/>
         </p:nvSpPr>
         <p:spPr>
           <a:xfrm>
-            <a:off x="1177200" y="1785600"/>
+            <a:off x="1177200" y="3686400"/>
             <a:ext cx="5810400" cy="370799"/>
           </a:xfrm>
           <a:prstGeom prst="rect">
@@ -4824,14 +4824,14 @@
       </p:sp>
       <p:sp>
         <p:nvSpPr>
-          <p:cNvPr id="8" name="TextBox 7"/>
+          <p:cNvPr id="14" name="TextBox 13"/>
           <p:cNvSpPr txBox="1"/>
           <p:nvPr/>
         </p:nvSpPr>
         <p:spPr>
           <a:xfrm>
-            <a:off x="1159200" y="2214000"/>
-            <a:ext cx="5828400" cy="885600"/>
+            <a:off x="1159200" y="4114800"/>
+            <a:ext cx="5828400" cy="1033199"/>
           </a:xfrm>
           <a:prstGeom prst="rect">
             <a:avLst/>
@@ -4923,14 +4923,14 @@
       </p:sp>
       <p:sp>
         <p:nvSpPr>
-          <p:cNvPr id="9" name="Rectangle 8"/>
+          <p:cNvPr id="15" name="Rectangle 14"/>
           <p:cNvSpPr/>
           <p:nvPr/>
         </p:nvSpPr>
         <p:spPr>
           <a:xfrm>
-            <a:off x="532800" y="3186000"/>
-            <a:ext cx="6490800" cy="1371600"/>
+            <a:off x="532800" y="5248800"/>
+            <a:ext cx="6490800" cy="1684800"/>
           </a:xfrm>
           <a:prstGeom prst="rect">
             <a:avLst/>
@@ -4964,14 +4964,14 @@
       </p:sp>
       <p:sp>
         <p:nvSpPr>
-          <p:cNvPr id="10" name="Rectangle 9"/>
+          <p:cNvPr id="16" name="Rectangle 15"/>
           <p:cNvSpPr/>
           <p:nvPr/>
         </p:nvSpPr>
         <p:spPr>
           <a:xfrm>
-            <a:off x="532800" y="3186000"/>
-            <a:ext cx="572400" cy="1371600"/>
+            <a:off x="532800" y="5248800"/>
+            <a:ext cx="572400" cy="1684800"/>
           </a:xfrm>
           <a:prstGeom prst="rect">
             <a:avLst/>
@@ -5005,13 +5005,13 @@
       </p:sp>
       <p:sp>
         <p:nvSpPr>
-          <p:cNvPr id="11" name="Rectangle 10"/>
+          <p:cNvPr id="17" name="Rectangle 16"/>
           <p:cNvSpPr/>
           <p:nvPr/>
         </p:nvSpPr>
         <p:spPr>
           <a:xfrm>
-            <a:off x="1206000" y="3607200"/>
+            <a:off x="1206000" y="5670000"/>
             <a:ext cx="5752800" cy="7200"/>
           </a:xfrm>
           <a:prstGeom prst="rect">
@@ -5046,13 +5046,13 @@
       </p:sp>
       <p:sp>
         <p:nvSpPr>
-          <p:cNvPr id="12" name="TextBox 11"/>
+          <p:cNvPr id="18" name="TextBox 17"/>
           <p:cNvSpPr txBox="1"/>
           <p:nvPr/>
         </p:nvSpPr>
         <p:spPr>
           <a:xfrm>
-            <a:off x="532800" y="3252600"/>
+            <a:off x="532800" y="5315400"/>
             <a:ext cx="572400" cy="288000"/>
           </a:xfrm>
           <a:prstGeom prst="rect">
@@ -5088,13 +5088,13 @@
       </p:sp>
       <p:sp>
         <p:nvSpPr>
-          <p:cNvPr id="13" name="TextBox 12"/>
+          <p:cNvPr id="19" name="TextBox 18"/>
           <p:cNvSpPr txBox="1"/>
           <p:nvPr/>
         </p:nvSpPr>
         <p:spPr>
           <a:xfrm>
-            <a:off x="1177200" y="3221999"/>
+            <a:off x="1177200" y="5284800"/>
             <a:ext cx="5810400" cy="370799"/>
           </a:xfrm>
           <a:prstGeom prst="rect">
@@ -5130,14 +5130,14 @@
       </p:sp>
       <p:sp>
         <p:nvSpPr>
-          <p:cNvPr id="14" name="TextBox 13"/>
+          <p:cNvPr id="20" name="TextBox 19"/>
           <p:cNvSpPr txBox="1"/>
           <p:nvPr/>
         </p:nvSpPr>
         <p:spPr>
           <a:xfrm>
-            <a:off x="1159200" y="3650399"/>
-            <a:ext cx="5828400" cy="885600"/>
+            <a:off x="1159200" y="5713200"/>
+            <a:ext cx="5828400" cy="1184399"/>
           </a:xfrm>
           <a:prstGeom prst="rect">
             <a:avLst/>
@@ -5229,14 +5229,14 @@
       </p:sp>
       <p:sp>
         <p:nvSpPr>
-          <p:cNvPr id="15" name="Rectangle 14"/>
+          <p:cNvPr id="21" name="Rectangle 20"/>
           <p:cNvSpPr/>
           <p:nvPr/>
         </p:nvSpPr>
         <p:spPr>
           <a:xfrm>
-            <a:off x="532800" y="4622400"/>
-            <a:ext cx="6490800" cy="1371600"/>
+            <a:off x="532800" y="6998399"/>
+            <a:ext cx="6490800" cy="1835999"/>
           </a:xfrm>
           <a:prstGeom prst="rect">
             <a:avLst/>
@@ -5270,14 +5270,14 @@
       </p:sp>
       <p:sp>
         <p:nvSpPr>
-          <p:cNvPr id="16" name="Rectangle 15"/>
+          <p:cNvPr id="22" name="Rectangle 21"/>
           <p:cNvSpPr/>
           <p:nvPr/>
         </p:nvSpPr>
         <p:spPr>
           <a:xfrm>
-            <a:off x="532800" y="4622400"/>
-            <a:ext cx="572400" cy="1371600"/>
+            <a:off x="532800" y="6998399"/>
+            <a:ext cx="572400" cy="1835999"/>
           </a:xfrm>
           <a:prstGeom prst="rect">
             <a:avLst/>
@@ -5311,13 +5311,13 @@
       </p:sp>
       <p:sp>
         <p:nvSpPr>
-          <p:cNvPr id="17" name="Rectangle 16"/>
+          <p:cNvPr id="23" name="Rectangle 22"/>
           <p:cNvSpPr/>
           <p:nvPr/>
         </p:nvSpPr>
         <p:spPr>
           <a:xfrm>
-            <a:off x="1206000" y="5043600"/>
+            <a:off x="1206000" y="7419600"/>
             <a:ext cx="5752800" cy="7200"/>
           </a:xfrm>
           <a:prstGeom prst="rect">
@@ -5352,13 +5352,13 @@
       </p:sp>
       <p:sp>
         <p:nvSpPr>
-          <p:cNvPr id="18" name="TextBox 17"/>
+          <p:cNvPr id="24" name="TextBox 23"/>
           <p:cNvSpPr txBox="1"/>
           <p:nvPr/>
         </p:nvSpPr>
         <p:spPr>
           <a:xfrm>
-            <a:off x="532800" y="4689000"/>
+            <a:off x="532800" y="7064999"/>
             <a:ext cx="572400" cy="288000"/>
           </a:xfrm>
           <a:prstGeom prst="rect">
@@ -5394,13 +5394,13 @@
       </p:sp>
       <p:sp>
         <p:nvSpPr>
-          <p:cNvPr id="19" name="TextBox 18"/>
+          <p:cNvPr id="25" name="TextBox 24"/>
           <p:cNvSpPr txBox="1"/>
           <p:nvPr/>
         </p:nvSpPr>
         <p:spPr>
           <a:xfrm>
-            <a:off x="1177200" y="4658400"/>
+            <a:off x="1177200" y="7034400"/>
             <a:ext cx="5810400" cy="370799"/>
           </a:xfrm>
           <a:prstGeom prst="rect">
@@ -5436,14 +5436,14 @@
       </p:sp>
       <p:sp>
         <p:nvSpPr>
-          <p:cNvPr id="20" name="TextBox 19"/>
+          <p:cNvPr id="26" name="TextBox 25"/>
           <p:cNvSpPr txBox="1"/>
           <p:nvPr/>
         </p:nvSpPr>
         <p:spPr>
           <a:xfrm>
-            <a:off x="1159200" y="5086800"/>
-            <a:ext cx="5828400" cy="885600"/>
+            <a:off x="1159200" y="7462800"/>
+            <a:ext cx="5828400" cy="1335599"/>
           </a:xfrm>
           <a:prstGeom prst="rect">
             <a:avLst/>
@@ -5535,13 +5535,13 @@
       </p:sp>
       <p:sp>
         <p:nvSpPr>
-          <p:cNvPr id="21" name="Rectangle 20"/>
+          <p:cNvPr id="27" name="Rectangle 26"/>
           <p:cNvSpPr/>
           <p:nvPr/>
         </p:nvSpPr>
         <p:spPr>
           <a:xfrm>
-            <a:off x="532800" y="8892000"/>
+            <a:off x="532800" y="9115200"/>
             <a:ext cx="6490800" cy="1512000"/>
           </a:xfrm>
           <a:prstGeom prst="rect">
@@ -5578,13 +5578,13 @@
       </p:sp>
       <p:sp>
         <p:nvSpPr>
-          <p:cNvPr id="22" name="Rectangle 21"/>
+          <p:cNvPr id="28" name="Rectangle 27"/>
           <p:cNvSpPr/>
           <p:nvPr/>
         </p:nvSpPr>
         <p:spPr>
           <a:xfrm>
-            <a:off x="2221200" y="9478800"/>
+            <a:off x="2221200" y="9702000"/>
             <a:ext cx="3110400" cy="7200"/>
           </a:xfrm>
           <a:prstGeom prst="rect">
@@ -5619,13 +5619,13 @@
       </p:sp>
       <p:sp>
         <p:nvSpPr>
-          <p:cNvPr id="23" name="TextBox 22"/>
+          <p:cNvPr id="29" name="TextBox 28"/>
           <p:cNvSpPr txBox="1"/>
           <p:nvPr/>
         </p:nvSpPr>
         <p:spPr>
           <a:xfrm>
-            <a:off x="1792800" y="8956800"/>
+            <a:off x="1792800" y="9180000"/>
             <a:ext cx="4140000" cy="1404000"/>
           </a:xfrm>
           <a:prstGeom prst="rect">
@@ -5737,7 +5737,7 @@
       </p:sp>
       <p:sp>
         <p:nvSpPr>
-          <p:cNvPr id="24" name="TextBox 23"/>
+          <p:cNvPr id="30" name="TextBox 29"/>
           <p:cNvSpPr txBox="1"/>
           <p:nvPr/>
         </p:nvSpPr>

--- a/assets/memos/B4-memo.pptx
+++ b/assets/memos/B4-memo.pptx
@@ -3097,9 +3097,35 @@
         <p:nvPr/>
       </p:nvGrpSpPr>
       <p:grpSpPr/>
-      <p:sp>
-        <p:nvSpPr>
-          <p:cNvPr id="2" name="TextBox 1"/>
+      <p:pic>
+        <p:nvPicPr>
+          <p:cNvPr id="2" name="Picture 1" descr="bg-p1.png"/>
+          <p:cNvPicPr>
+            <a:picLocks noChangeAspect="1"/>
+          </p:cNvPicPr>
+          <p:nvPr/>
+        </p:nvPicPr>
+        <p:blipFill>
+          <a:blip r:embed="rId2">
+            <a:alphaModFix amt="80000"/>
+          </a:blip>
+          <a:stretch>
+            <a:fillRect/>
+          </a:stretch>
+        </p:blipFill>
+        <p:spPr>
+          <a:xfrm>
+            <a:off x="0" y="0"/>
+            <a:ext cx="7556399" cy="10692000"/>
+          </a:xfrm>
+          <a:prstGeom prst="rect">
+            <a:avLst/>
+          </a:prstGeom>
+        </p:spPr>
+      </p:pic>
+      <p:sp>
+        <p:nvSpPr>
+          <p:cNvPr id="3" name="TextBox 2"/>
           <p:cNvSpPr txBox="1"/>
           <p:nvPr/>
         </p:nvSpPr>
@@ -3160,7 +3186,7 @@
       </p:sp>
       <p:sp>
         <p:nvSpPr>
-          <p:cNvPr id="3" name="Rectangle 2"/>
+          <p:cNvPr id="4" name="Rectangle 3"/>
           <p:cNvSpPr/>
           <p:nvPr/>
         </p:nvSpPr>
@@ -3201,7 +3227,7 @@
       </p:sp>
       <p:sp>
         <p:nvSpPr>
-          <p:cNvPr id="4" name="Rectangle 3"/>
+          <p:cNvPr id="5" name="Rectangle 4"/>
           <p:cNvSpPr/>
           <p:nvPr/>
         </p:nvSpPr>
@@ -3242,7 +3268,7 @@
       </p:sp>
       <p:sp>
         <p:nvSpPr>
-          <p:cNvPr id="5" name="Rectangle 4"/>
+          <p:cNvPr id="6" name="Rectangle 5"/>
           <p:cNvSpPr/>
           <p:nvPr/>
         </p:nvSpPr>
@@ -3283,7 +3309,7 @@
       </p:sp>
       <p:sp>
         <p:nvSpPr>
-          <p:cNvPr id="6" name="TextBox 5"/>
+          <p:cNvPr id="7" name="TextBox 6"/>
           <p:cNvSpPr txBox="1"/>
           <p:nvPr/>
         </p:nvSpPr>
@@ -3325,7 +3351,7 @@
       </p:sp>
       <p:sp>
         <p:nvSpPr>
-          <p:cNvPr id="7" name="TextBox 6"/>
+          <p:cNvPr id="8" name="TextBox 7"/>
           <p:cNvSpPr txBox="1"/>
           <p:nvPr/>
         </p:nvSpPr>
@@ -3367,7 +3393,7 @@
       </p:sp>
       <p:sp>
         <p:nvSpPr>
-          <p:cNvPr id="8" name="TextBox 7"/>
+          <p:cNvPr id="9" name="TextBox 8"/>
           <p:cNvSpPr txBox="1"/>
           <p:nvPr/>
         </p:nvSpPr>
@@ -3466,7 +3492,7 @@
       </p:sp>
       <p:sp>
         <p:nvSpPr>
-          <p:cNvPr id="9" name="Rectangle 8"/>
+          <p:cNvPr id="10" name="Rectangle 9"/>
           <p:cNvSpPr/>
           <p:nvPr/>
         </p:nvSpPr>
@@ -3507,7 +3533,7 @@
       </p:sp>
       <p:sp>
         <p:nvSpPr>
-          <p:cNvPr id="10" name="Rectangle 9"/>
+          <p:cNvPr id="11" name="Rectangle 10"/>
           <p:cNvSpPr/>
           <p:nvPr/>
         </p:nvSpPr>
@@ -3548,7 +3574,7 @@
       </p:sp>
       <p:sp>
         <p:nvSpPr>
-          <p:cNvPr id="11" name="Rectangle 10"/>
+          <p:cNvPr id="12" name="Rectangle 11"/>
           <p:cNvSpPr/>
           <p:nvPr/>
         </p:nvSpPr>
@@ -3589,7 +3615,7 @@
       </p:sp>
       <p:sp>
         <p:nvSpPr>
-          <p:cNvPr id="12" name="TextBox 11"/>
+          <p:cNvPr id="13" name="TextBox 12"/>
           <p:cNvSpPr txBox="1"/>
           <p:nvPr/>
         </p:nvSpPr>
@@ -3631,7 +3657,7 @@
       </p:sp>
       <p:sp>
         <p:nvSpPr>
-          <p:cNvPr id="13" name="TextBox 12"/>
+          <p:cNvPr id="14" name="TextBox 13"/>
           <p:cNvSpPr txBox="1"/>
           <p:nvPr/>
         </p:nvSpPr>
@@ -3673,7 +3699,7 @@
       </p:sp>
       <p:sp>
         <p:nvSpPr>
-          <p:cNvPr id="14" name="TextBox 13"/>
+          <p:cNvPr id="15" name="TextBox 14"/>
           <p:cNvSpPr txBox="1"/>
           <p:nvPr/>
         </p:nvSpPr>
@@ -3772,7 +3798,7 @@
       </p:sp>
       <p:sp>
         <p:nvSpPr>
-          <p:cNvPr id="15" name="Rectangle 14"/>
+          <p:cNvPr id="16" name="Rectangle 15"/>
           <p:cNvSpPr/>
           <p:nvPr/>
         </p:nvSpPr>
@@ -3813,7 +3839,7 @@
       </p:sp>
       <p:sp>
         <p:nvSpPr>
-          <p:cNvPr id="16" name="Rectangle 15"/>
+          <p:cNvPr id="17" name="Rectangle 16"/>
           <p:cNvSpPr/>
           <p:nvPr/>
         </p:nvSpPr>
@@ -3854,7 +3880,7 @@
       </p:sp>
       <p:sp>
         <p:nvSpPr>
-          <p:cNvPr id="17" name="Rectangle 16"/>
+          <p:cNvPr id="18" name="Rectangle 17"/>
           <p:cNvSpPr/>
           <p:nvPr/>
         </p:nvSpPr>
@@ -3895,7 +3921,7 @@
       </p:sp>
       <p:sp>
         <p:nvSpPr>
-          <p:cNvPr id="18" name="TextBox 17"/>
+          <p:cNvPr id="19" name="TextBox 18"/>
           <p:cNvSpPr txBox="1"/>
           <p:nvPr/>
         </p:nvSpPr>
@@ -3937,7 +3963,7 @@
       </p:sp>
       <p:sp>
         <p:nvSpPr>
-          <p:cNvPr id="19" name="TextBox 18"/>
+          <p:cNvPr id="20" name="TextBox 19"/>
           <p:cNvSpPr txBox="1"/>
           <p:nvPr/>
         </p:nvSpPr>
@@ -3979,7 +4005,7 @@
       </p:sp>
       <p:sp>
         <p:nvSpPr>
-          <p:cNvPr id="20" name="TextBox 19"/>
+          <p:cNvPr id="21" name="TextBox 20"/>
           <p:cNvSpPr txBox="1"/>
           <p:nvPr/>
         </p:nvSpPr>
@@ -4078,7 +4104,7 @@
       </p:sp>
       <p:sp>
         <p:nvSpPr>
-          <p:cNvPr id="21" name="Rectangle 20"/>
+          <p:cNvPr id="22" name="Rectangle 21"/>
           <p:cNvSpPr/>
           <p:nvPr/>
         </p:nvSpPr>
@@ -4121,7 +4147,7 @@
       </p:sp>
       <p:sp>
         <p:nvSpPr>
-          <p:cNvPr id="22" name="TextBox 21"/>
+          <p:cNvPr id="23" name="TextBox 22"/>
           <p:cNvSpPr txBox="1"/>
           <p:nvPr/>
         </p:nvSpPr>
@@ -4182,7 +4208,7 @@
       </p:sp>
       <p:sp>
         <p:nvSpPr>
-          <p:cNvPr id="23" name="TextBox 22"/>
+          <p:cNvPr id="24" name="TextBox 23"/>
           <p:cNvSpPr txBox="1"/>
           <p:nvPr/>
         </p:nvSpPr>
@@ -4248,9 +4274,35 @@
         <p:nvPr/>
       </p:nvGrpSpPr>
       <p:grpSpPr/>
-      <p:sp>
-        <p:nvSpPr>
-          <p:cNvPr id="2" name="TextBox 1"/>
+      <p:pic>
+        <p:nvPicPr>
+          <p:cNvPr id="2" name="Picture 1" descr="bg-p2.png"/>
+          <p:cNvPicPr>
+            <a:picLocks noChangeAspect="1"/>
+          </p:cNvPicPr>
+          <p:nvPr/>
+        </p:nvPicPr>
+        <p:blipFill>
+          <a:blip r:embed="rId2">
+            <a:alphaModFix amt="80000"/>
+          </a:blip>
+          <a:stretch>
+            <a:fillRect/>
+          </a:stretch>
+        </p:blipFill>
+        <p:spPr>
+          <a:xfrm>
+            <a:off x="0" y="0"/>
+            <a:ext cx="7556399" cy="10692000"/>
+          </a:xfrm>
+          <a:prstGeom prst="rect">
+            <a:avLst/>
+          </a:prstGeom>
+        </p:spPr>
+      </p:pic>
+      <p:sp>
+        <p:nvSpPr>
+          <p:cNvPr id="3" name="TextBox 2"/>
           <p:cNvSpPr txBox="1"/>
           <p:nvPr/>
         </p:nvSpPr>
@@ -4311,7 +4363,7 @@
       </p:sp>
       <p:sp>
         <p:nvSpPr>
-          <p:cNvPr id="3" name="Rectangle 2"/>
+          <p:cNvPr id="4" name="Rectangle 3"/>
           <p:cNvSpPr/>
           <p:nvPr/>
         </p:nvSpPr>
@@ -4352,7 +4404,7 @@
       </p:sp>
       <p:sp>
         <p:nvSpPr>
-          <p:cNvPr id="4" name="Rectangle 3"/>
+          <p:cNvPr id="5" name="Rectangle 4"/>
           <p:cNvSpPr/>
           <p:nvPr/>
         </p:nvSpPr>
@@ -4393,7 +4445,7 @@
       </p:sp>
       <p:sp>
         <p:nvSpPr>
-          <p:cNvPr id="5" name="Rectangle 4"/>
+          <p:cNvPr id="6" name="Rectangle 5"/>
           <p:cNvSpPr/>
           <p:nvPr/>
         </p:nvSpPr>
@@ -4434,7 +4486,7 @@
       </p:sp>
       <p:sp>
         <p:nvSpPr>
-          <p:cNvPr id="6" name="TextBox 5"/>
+          <p:cNvPr id="7" name="TextBox 6"/>
           <p:cNvSpPr txBox="1"/>
           <p:nvPr/>
         </p:nvSpPr>
@@ -4476,7 +4528,7 @@
       </p:sp>
       <p:sp>
         <p:nvSpPr>
-          <p:cNvPr id="7" name="TextBox 6"/>
+          <p:cNvPr id="8" name="TextBox 7"/>
           <p:cNvSpPr txBox="1"/>
           <p:nvPr/>
         </p:nvSpPr>
@@ -4518,7 +4570,7 @@
       </p:sp>
       <p:sp>
         <p:nvSpPr>
-          <p:cNvPr id="8" name="TextBox 7"/>
+          <p:cNvPr id="9" name="TextBox 8"/>
           <p:cNvSpPr txBox="1"/>
           <p:nvPr/>
         </p:nvSpPr>
@@ -4617,7 +4669,7 @@
       </p:sp>
       <p:sp>
         <p:nvSpPr>
-          <p:cNvPr id="9" name="Rectangle 8"/>
+          <p:cNvPr id="10" name="Rectangle 9"/>
           <p:cNvSpPr/>
           <p:nvPr/>
         </p:nvSpPr>
@@ -4658,7 +4710,7 @@
       </p:sp>
       <p:sp>
         <p:nvSpPr>
-          <p:cNvPr id="10" name="Rectangle 9"/>
+          <p:cNvPr id="11" name="Rectangle 10"/>
           <p:cNvSpPr/>
           <p:nvPr/>
         </p:nvSpPr>
@@ -4699,7 +4751,7 @@
       </p:sp>
       <p:sp>
         <p:nvSpPr>
-          <p:cNvPr id="11" name="Rectangle 10"/>
+          <p:cNvPr id="12" name="Rectangle 11"/>
           <p:cNvSpPr/>
           <p:nvPr/>
         </p:nvSpPr>
@@ -4740,7 +4792,7 @@
       </p:sp>
       <p:sp>
         <p:nvSpPr>
-          <p:cNvPr id="12" name="TextBox 11"/>
+          <p:cNvPr id="13" name="TextBox 12"/>
           <p:cNvSpPr txBox="1"/>
           <p:nvPr/>
         </p:nvSpPr>
@@ -4782,7 +4834,7 @@
       </p:sp>
       <p:sp>
         <p:nvSpPr>
-          <p:cNvPr id="13" name="TextBox 12"/>
+          <p:cNvPr id="14" name="TextBox 13"/>
           <p:cNvSpPr txBox="1"/>
           <p:nvPr/>
         </p:nvSpPr>
@@ -4824,7 +4876,7 @@
       </p:sp>
       <p:sp>
         <p:nvSpPr>
-          <p:cNvPr id="14" name="TextBox 13"/>
+          <p:cNvPr id="15" name="TextBox 14"/>
           <p:cNvSpPr txBox="1"/>
           <p:nvPr/>
         </p:nvSpPr>
@@ -4923,7 +4975,7 @@
       </p:sp>
       <p:sp>
         <p:nvSpPr>
-          <p:cNvPr id="15" name="Rectangle 14"/>
+          <p:cNvPr id="16" name="Rectangle 15"/>
           <p:cNvSpPr/>
           <p:nvPr/>
         </p:nvSpPr>
@@ -4964,7 +5016,7 @@
       </p:sp>
       <p:sp>
         <p:nvSpPr>
-          <p:cNvPr id="16" name="Rectangle 15"/>
+          <p:cNvPr id="17" name="Rectangle 16"/>
           <p:cNvSpPr/>
           <p:nvPr/>
         </p:nvSpPr>
@@ -5005,7 +5057,7 @@
       </p:sp>
       <p:sp>
         <p:nvSpPr>
-          <p:cNvPr id="17" name="Rectangle 16"/>
+          <p:cNvPr id="18" name="Rectangle 17"/>
           <p:cNvSpPr/>
           <p:nvPr/>
         </p:nvSpPr>
@@ -5046,7 +5098,7 @@
       </p:sp>
       <p:sp>
         <p:nvSpPr>
-          <p:cNvPr id="18" name="TextBox 17"/>
+          <p:cNvPr id="19" name="TextBox 18"/>
           <p:cNvSpPr txBox="1"/>
           <p:nvPr/>
         </p:nvSpPr>
@@ -5088,7 +5140,7 @@
       </p:sp>
       <p:sp>
         <p:nvSpPr>
-          <p:cNvPr id="19" name="TextBox 18"/>
+          <p:cNvPr id="20" name="TextBox 19"/>
           <p:cNvSpPr txBox="1"/>
           <p:nvPr/>
         </p:nvSpPr>
@@ -5130,7 +5182,7 @@
       </p:sp>
       <p:sp>
         <p:nvSpPr>
-          <p:cNvPr id="20" name="TextBox 19"/>
+          <p:cNvPr id="21" name="TextBox 20"/>
           <p:cNvSpPr txBox="1"/>
           <p:nvPr/>
         </p:nvSpPr>
@@ -5229,7 +5281,7 @@
       </p:sp>
       <p:sp>
         <p:nvSpPr>
-          <p:cNvPr id="21" name="Rectangle 20"/>
+          <p:cNvPr id="22" name="Rectangle 21"/>
           <p:cNvSpPr/>
           <p:nvPr/>
         </p:nvSpPr>
@@ -5270,7 +5322,7 @@
       </p:sp>
       <p:sp>
         <p:nvSpPr>
-          <p:cNvPr id="22" name="Rectangle 21"/>
+          <p:cNvPr id="23" name="Rectangle 22"/>
           <p:cNvSpPr/>
           <p:nvPr/>
         </p:nvSpPr>
@@ -5311,7 +5363,7 @@
       </p:sp>
       <p:sp>
         <p:nvSpPr>
-          <p:cNvPr id="23" name="Rectangle 22"/>
+          <p:cNvPr id="24" name="Rectangle 23"/>
           <p:cNvSpPr/>
           <p:nvPr/>
         </p:nvSpPr>
@@ -5352,7 +5404,7 @@
       </p:sp>
       <p:sp>
         <p:nvSpPr>
-          <p:cNvPr id="24" name="TextBox 23"/>
+          <p:cNvPr id="25" name="TextBox 24"/>
           <p:cNvSpPr txBox="1"/>
           <p:nvPr/>
         </p:nvSpPr>
@@ -5394,7 +5446,7 @@
       </p:sp>
       <p:sp>
         <p:nvSpPr>
-          <p:cNvPr id="25" name="TextBox 24"/>
+          <p:cNvPr id="26" name="TextBox 25"/>
           <p:cNvSpPr txBox="1"/>
           <p:nvPr/>
         </p:nvSpPr>
@@ -5436,7 +5488,7 @@
       </p:sp>
       <p:sp>
         <p:nvSpPr>
-          <p:cNvPr id="26" name="TextBox 25"/>
+          <p:cNvPr id="27" name="TextBox 26"/>
           <p:cNvSpPr txBox="1"/>
           <p:nvPr/>
         </p:nvSpPr>
@@ -5535,7 +5587,7 @@
       </p:sp>
       <p:sp>
         <p:nvSpPr>
-          <p:cNvPr id="27" name="Rectangle 26"/>
+          <p:cNvPr id="28" name="Rectangle 27"/>
           <p:cNvSpPr/>
           <p:nvPr/>
         </p:nvSpPr>
@@ -5578,7 +5630,7 @@
       </p:sp>
       <p:sp>
         <p:nvSpPr>
-          <p:cNvPr id="28" name="Rectangle 27"/>
+          <p:cNvPr id="29" name="Rectangle 28"/>
           <p:cNvSpPr/>
           <p:nvPr/>
         </p:nvSpPr>
@@ -5619,7 +5671,7 @@
       </p:sp>
       <p:sp>
         <p:nvSpPr>
-          <p:cNvPr id="29" name="TextBox 28"/>
+          <p:cNvPr id="30" name="TextBox 29"/>
           <p:cNvSpPr txBox="1"/>
           <p:nvPr/>
         </p:nvSpPr>
@@ -5737,7 +5789,7 @@
       </p:sp>
       <p:sp>
         <p:nvSpPr>
-          <p:cNvPr id="30" name="TextBox 29"/>
+          <p:cNvPr id="31" name="TextBox 30"/>
           <p:cNvSpPr txBox="1"/>
           <p:nvPr/>
         </p:nvSpPr>

--- a/assets/memos/B4-memo.pptx
+++ b/assets/memos/B4-memo.pptx
@@ -3084,9 +3084,12 @@
   <p:cSld>
     <p:bg>
       <p:bgPr>
-        <a:solidFill>
-          <a:srgbClr val="FFFFFF"/>
-        </a:solidFill>
+        <a:blipFill>
+          <a:blip r:embed="rId2"/>
+          <a:stretch>
+            <a:fillRect/>
+          </a:stretch>
+        </a:blipFill>
         <a:effectLst/>
       </p:bgPr>
     </p:bg>
@@ -3097,35 +3100,9 @@
         <p:nvPr/>
       </p:nvGrpSpPr>
       <p:grpSpPr/>
-      <p:pic>
-        <p:nvPicPr>
-          <p:cNvPr id="2" name="Picture 1" descr="bg-p1.png"/>
-          <p:cNvPicPr>
-            <a:picLocks noChangeAspect="1"/>
-          </p:cNvPicPr>
-          <p:nvPr/>
-        </p:nvPicPr>
-        <p:blipFill>
-          <a:blip r:embed="rId2">
-            <a:alphaModFix amt="80000"/>
-          </a:blip>
-          <a:stretch>
-            <a:fillRect/>
-          </a:stretch>
-        </p:blipFill>
-        <p:spPr>
-          <a:xfrm>
-            <a:off x="0" y="0"/>
-            <a:ext cx="7556399" cy="10692000"/>
-          </a:xfrm>
-          <a:prstGeom prst="rect">
-            <a:avLst/>
-          </a:prstGeom>
-        </p:spPr>
-      </p:pic>
-      <p:sp>
-        <p:nvSpPr>
-          <p:cNvPr id="3" name="TextBox 2"/>
+      <p:sp>
+        <p:nvSpPr>
+          <p:cNvPr id="2" name="TextBox 1"/>
           <p:cNvSpPr txBox="1"/>
           <p:nvPr/>
         </p:nvSpPr>
@@ -3186,7 +3163,7 @@
       </p:sp>
       <p:sp>
         <p:nvSpPr>
-          <p:cNvPr id="4" name="Rectangle 3"/>
+          <p:cNvPr id="3" name="Rectangle 2"/>
           <p:cNvSpPr/>
           <p:nvPr/>
         </p:nvSpPr>
@@ -3227,7 +3204,7 @@
       </p:sp>
       <p:sp>
         <p:nvSpPr>
-          <p:cNvPr id="5" name="Rectangle 4"/>
+          <p:cNvPr id="4" name="Rectangle 3"/>
           <p:cNvSpPr/>
           <p:nvPr/>
         </p:nvSpPr>
@@ -3268,7 +3245,7 @@
       </p:sp>
       <p:sp>
         <p:nvSpPr>
-          <p:cNvPr id="6" name="Rectangle 5"/>
+          <p:cNvPr id="5" name="Rectangle 4"/>
           <p:cNvSpPr/>
           <p:nvPr/>
         </p:nvSpPr>
@@ -3309,7 +3286,7 @@
       </p:sp>
       <p:sp>
         <p:nvSpPr>
-          <p:cNvPr id="7" name="TextBox 6"/>
+          <p:cNvPr id="6" name="TextBox 5"/>
           <p:cNvSpPr txBox="1"/>
           <p:nvPr/>
         </p:nvSpPr>
@@ -3351,7 +3328,7 @@
       </p:sp>
       <p:sp>
         <p:nvSpPr>
-          <p:cNvPr id="8" name="TextBox 7"/>
+          <p:cNvPr id="7" name="TextBox 6"/>
           <p:cNvSpPr txBox="1"/>
           <p:nvPr/>
         </p:nvSpPr>
@@ -3393,7 +3370,7 @@
       </p:sp>
       <p:sp>
         <p:nvSpPr>
-          <p:cNvPr id="9" name="TextBox 8"/>
+          <p:cNvPr id="8" name="TextBox 7"/>
           <p:cNvSpPr txBox="1"/>
           <p:nvPr/>
         </p:nvSpPr>
@@ -3492,7 +3469,7 @@
       </p:sp>
       <p:sp>
         <p:nvSpPr>
-          <p:cNvPr id="10" name="Rectangle 9"/>
+          <p:cNvPr id="9" name="Rectangle 8"/>
           <p:cNvSpPr/>
           <p:nvPr/>
         </p:nvSpPr>
@@ -3533,7 +3510,7 @@
       </p:sp>
       <p:sp>
         <p:nvSpPr>
-          <p:cNvPr id="11" name="Rectangle 10"/>
+          <p:cNvPr id="10" name="Rectangle 9"/>
           <p:cNvSpPr/>
           <p:nvPr/>
         </p:nvSpPr>
@@ -3574,7 +3551,7 @@
       </p:sp>
       <p:sp>
         <p:nvSpPr>
-          <p:cNvPr id="12" name="Rectangle 11"/>
+          <p:cNvPr id="11" name="Rectangle 10"/>
           <p:cNvSpPr/>
           <p:nvPr/>
         </p:nvSpPr>
@@ -3615,7 +3592,7 @@
       </p:sp>
       <p:sp>
         <p:nvSpPr>
-          <p:cNvPr id="13" name="TextBox 12"/>
+          <p:cNvPr id="12" name="TextBox 11"/>
           <p:cNvSpPr txBox="1"/>
           <p:nvPr/>
         </p:nvSpPr>
@@ -3657,7 +3634,7 @@
       </p:sp>
       <p:sp>
         <p:nvSpPr>
-          <p:cNvPr id="14" name="TextBox 13"/>
+          <p:cNvPr id="13" name="TextBox 12"/>
           <p:cNvSpPr txBox="1"/>
           <p:nvPr/>
         </p:nvSpPr>
@@ -3699,7 +3676,7 @@
       </p:sp>
       <p:sp>
         <p:nvSpPr>
-          <p:cNvPr id="15" name="TextBox 14"/>
+          <p:cNvPr id="14" name="TextBox 13"/>
           <p:cNvSpPr txBox="1"/>
           <p:nvPr/>
         </p:nvSpPr>
@@ -3798,7 +3775,7 @@
       </p:sp>
       <p:sp>
         <p:nvSpPr>
-          <p:cNvPr id="16" name="Rectangle 15"/>
+          <p:cNvPr id="15" name="Rectangle 14"/>
           <p:cNvSpPr/>
           <p:nvPr/>
         </p:nvSpPr>
@@ -3839,7 +3816,7 @@
       </p:sp>
       <p:sp>
         <p:nvSpPr>
-          <p:cNvPr id="17" name="Rectangle 16"/>
+          <p:cNvPr id="16" name="Rectangle 15"/>
           <p:cNvSpPr/>
           <p:nvPr/>
         </p:nvSpPr>
@@ -3880,7 +3857,7 @@
       </p:sp>
       <p:sp>
         <p:nvSpPr>
-          <p:cNvPr id="18" name="Rectangle 17"/>
+          <p:cNvPr id="17" name="Rectangle 16"/>
           <p:cNvSpPr/>
           <p:nvPr/>
         </p:nvSpPr>
@@ -3921,7 +3898,7 @@
       </p:sp>
       <p:sp>
         <p:nvSpPr>
-          <p:cNvPr id="19" name="TextBox 18"/>
+          <p:cNvPr id="18" name="TextBox 17"/>
           <p:cNvSpPr txBox="1"/>
           <p:nvPr/>
         </p:nvSpPr>
@@ -3963,7 +3940,7 @@
       </p:sp>
       <p:sp>
         <p:nvSpPr>
-          <p:cNvPr id="20" name="TextBox 19"/>
+          <p:cNvPr id="19" name="TextBox 18"/>
           <p:cNvSpPr txBox="1"/>
           <p:nvPr/>
         </p:nvSpPr>
@@ -4005,7 +3982,7 @@
       </p:sp>
       <p:sp>
         <p:nvSpPr>
-          <p:cNvPr id="21" name="TextBox 20"/>
+          <p:cNvPr id="20" name="TextBox 19"/>
           <p:cNvSpPr txBox="1"/>
           <p:nvPr/>
         </p:nvSpPr>
@@ -4104,7 +4081,7 @@
       </p:sp>
       <p:sp>
         <p:nvSpPr>
-          <p:cNvPr id="22" name="Rectangle 21"/>
+          <p:cNvPr id="21" name="Rectangle 20"/>
           <p:cNvSpPr/>
           <p:nvPr/>
         </p:nvSpPr>
@@ -4147,7 +4124,7 @@
       </p:sp>
       <p:sp>
         <p:nvSpPr>
-          <p:cNvPr id="23" name="TextBox 22"/>
+          <p:cNvPr id="22" name="TextBox 21"/>
           <p:cNvSpPr txBox="1"/>
           <p:nvPr/>
         </p:nvSpPr>
@@ -4208,7 +4185,7 @@
       </p:sp>
       <p:sp>
         <p:nvSpPr>
-          <p:cNvPr id="24" name="TextBox 23"/>
+          <p:cNvPr id="23" name="TextBox 22"/>
           <p:cNvSpPr txBox="1"/>
           <p:nvPr/>
         </p:nvSpPr>
@@ -4261,9 +4238,12 @@
   <p:cSld>
     <p:bg>
       <p:bgPr>
-        <a:solidFill>
-          <a:srgbClr val="FFFFFF"/>
-        </a:solidFill>
+        <a:blipFill>
+          <a:blip r:embed="rId2"/>
+          <a:stretch>
+            <a:fillRect/>
+          </a:stretch>
+        </a:blipFill>
         <a:effectLst/>
       </p:bgPr>
     </p:bg>
@@ -4274,35 +4254,9 @@
         <p:nvPr/>
       </p:nvGrpSpPr>
       <p:grpSpPr/>
-      <p:pic>
-        <p:nvPicPr>
-          <p:cNvPr id="2" name="Picture 1" descr="bg-p2.png"/>
-          <p:cNvPicPr>
-            <a:picLocks noChangeAspect="1"/>
-          </p:cNvPicPr>
-          <p:nvPr/>
-        </p:nvPicPr>
-        <p:blipFill>
-          <a:blip r:embed="rId2">
-            <a:alphaModFix amt="80000"/>
-          </a:blip>
-          <a:stretch>
-            <a:fillRect/>
-          </a:stretch>
-        </p:blipFill>
-        <p:spPr>
-          <a:xfrm>
-            <a:off x="0" y="0"/>
-            <a:ext cx="7556399" cy="10692000"/>
-          </a:xfrm>
-          <a:prstGeom prst="rect">
-            <a:avLst/>
-          </a:prstGeom>
-        </p:spPr>
-      </p:pic>
-      <p:sp>
-        <p:nvSpPr>
-          <p:cNvPr id="3" name="TextBox 2"/>
+      <p:sp>
+        <p:nvSpPr>
+          <p:cNvPr id="2" name="TextBox 1"/>
           <p:cNvSpPr txBox="1"/>
           <p:nvPr/>
         </p:nvSpPr>
@@ -4363,7 +4317,7 @@
       </p:sp>
       <p:sp>
         <p:nvSpPr>
-          <p:cNvPr id="4" name="Rectangle 3"/>
+          <p:cNvPr id="3" name="Rectangle 2"/>
           <p:cNvSpPr/>
           <p:nvPr/>
         </p:nvSpPr>
@@ -4404,7 +4358,7 @@
       </p:sp>
       <p:sp>
         <p:nvSpPr>
-          <p:cNvPr id="5" name="Rectangle 4"/>
+          <p:cNvPr id="4" name="Rectangle 3"/>
           <p:cNvSpPr/>
           <p:nvPr/>
         </p:nvSpPr>
@@ -4445,7 +4399,7 @@
       </p:sp>
       <p:sp>
         <p:nvSpPr>
-          <p:cNvPr id="6" name="Rectangle 5"/>
+          <p:cNvPr id="5" name="Rectangle 4"/>
           <p:cNvSpPr/>
           <p:nvPr/>
         </p:nvSpPr>
@@ -4486,7 +4440,7 @@
       </p:sp>
       <p:sp>
         <p:nvSpPr>
-          <p:cNvPr id="7" name="TextBox 6"/>
+          <p:cNvPr id="6" name="TextBox 5"/>
           <p:cNvSpPr txBox="1"/>
           <p:nvPr/>
         </p:nvSpPr>
@@ -4528,7 +4482,7 @@
       </p:sp>
       <p:sp>
         <p:nvSpPr>
-          <p:cNvPr id="8" name="TextBox 7"/>
+          <p:cNvPr id="7" name="TextBox 6"/>
           <p:cNvSpPr txBox="1"/>
           <p:nvPr/>
         </p:nvSpPr>
@@ -4570,7 +4524,7 @@
       </p:sp>
       <p:sp>
         <p:nvSpPr>
-          <p:cNvPr id="9" name="TextBox 8"/>
+          <p:cNvPr id="8" name="TextBox 7"/>
           <p:cNvSpPr txBox="1"/>
           <p:nvPr/>
         </p:nvSpPr>
@@ -4669,7 +4623,7 @@
       </p:sp>
       <p:sp>
         <p:nvSpPr>
-          <p:cNvPr id="10" name="Rectangle 9"/>
+          <p:cNvPr id="9" name="Rectangle 8"/>
           <p:cNvSpPr/>
           <p:nvPr/>
         </p:nvSpPr>
@@ -4710,7 +4664,7 @@
       </p:sp>
       <p:sp>
         <p:nvSpPr>
-          <p:cNvPr id="11" name="Rectangle 10"/>
+          <p:cNvPr id="10" name="Rectangle 9"/>
           <p:cNvSpPr/>
           <p:nvPr/>
         </p:nvSpPr>
@@ -4751,7 +4705,7 @@
       </p:sp>
       <p:sp>
         <p:nvSpPr>
-          <p:cNvPr id="12" name="Rectangle 11"/>
+          <p:cNvPr id="11" name="Rectangle 10"/>
           <p:cNvSpPr/>
           <p:nvPr/>
         </p:nvSpPr>
@@ -4792,7 +4746,7 @@
       </p:sp>
       <p:sp>
         <p:nvSpPr>
-          <p:cNvPr id="13" name="TextBox 12"/>
+          <p:cNvPr id="12" name="TextBox 11"/>
           <p:cNvSpPr txBox="1"/>
           <p:nvPr/>
         </p:nvSpPr>
@@ -4834,7 +4788,7 @@
       </p:sp>
       <p:sp>
         <p:nvSpPr>
-          <p:cNvPr id="14" name="TextBox 13"/>
+          <p:cNvPr id="13" name="TextBox 12"/>
           <p:cNvSpPr txBox="1"/>
           <p:nvPr/>
         </p:nvSpPr>
@@ -4876,7 +4830,7 @@
       </p:sp>
       <p:sp>
         <p:nvSpPr>
-          <p:cNvPr id="15" name="TextBox 14"/>
+          <p:cNvPr id="14" name="TextBox 13"/>
           <p:cNvSpPr txBox="1"/>
           <p:nvPr/>
         </p:nvSpPr>
@@ -4975,7 +4929,7 @@
       </p:sp>
       <p:sp>
         <p:nvSpPr>
-          <p:cNvPr id="16" name="Rectangle 15"/>
+          <p:cNvPr id="15" name="Rectangle 14"/>
           <p:cNvSpPr/>
           <p:nvPr/>
         </p:nvSpPr>
@@ -5016,7 +4970,7 @@
       </p:sp>
       <p:sp>
         <p:nvSpPr>
-          <p:cNvPr id="17" name="Rectangle 16"/>
+          <p:cNvPr id="16" name="Rectangle 15"/>
           <p:cNvSpPr/>
           <p:nvPr/>
         </p:nvSpPr>
@@ -5057,7 +5011,7 @@
       </p:sp>
       <p:sp>
         <p:nvSpPr>
-          <p:cNvPr id="18" name="Rectangle 17"/>
+          <p:cNvPr id="17" name="Rectangle 16"/>
           <p:cNvSpPr/>
           <p:nvPr/>
         </p:nvSpPr>
@@ -5098,7 +5052,7 @@
       </p:sp>
       <p:sp>
         <p:nvSpPr>
-          <p:cNvPr id="19" name="TextBox 18"/>
+          <p:cNvPr id="18" name="TextBox 17"/>
           <p:cNvSpPr txBox="1"/>
           <p:nvPr/>
         </p:nvSpPr>
@@ -5140,7 +5094,7 @@
       </p:sp>
       <p:sp>
         <p:nvSpPr>
-          <p:cNvPr id="20" name="TextBox 19"/>
+          <p:cNvPr id="19" name="TextBox 18"/>
           <p:cNvSpPr txBox="1"/>
           <p:nvPr/>
         </p:nvSpPr>
@@ -5182,7 +5136,7 @@
       </p:sp>
       <p:sp>
         <p:nvSpPr>
-          <p:cNvPr id="21" name="TextBox 20"/>
+          <p:cNvPr id="20" name="TextBox 19"/>
           <p:cNvSpPr txBox="1"/>
           <p:nvPr/>
         </p:nvSpPr>
@@ -5281,7 +5235,7 @@
       </p:sp>
       <p:sp>
         <p:nvSpPr>
-          <p:cNvPr id="22" name="Rectangle 21"/>
+          <p:cNvPr id="21" name="Rectangle 20"/>
           <p:cNvSpPr/>
           <p:nvPr/>
         </p:nvSpPr>
@@ -5322,7 +5276,7 @@
       </p:sp>
       <p:sp>
         <p:nvSpPr>
-          <p:cNvPr id="23" name="Rectangle 22"/>
+          <p:cNvPr id="22" name="Rectangle 21"/>
           <p:cNvSpPr/>
           <p:nvPr/>
         </p:nvSpPr>
@@ -5363,7 +5317,7 @@
       </p:sp>
       <p:sp>
         <p:nvSpPr>
-          <p:cNvPr id="24" name="Rectangle 23"/>
+          <p:cNvPr id="23" name="Rectangle 22"/>
           <p:cNvSpPr/>
           <p:nvPr/>
         </p:nvSpPr>
@@ -5404,7 +5358,7 @@
       </p:sp>
       <p:sp>
         <p:nvSpPr>
-          <p:cNvPr id="25" name="TextBox 24"/>
+          <p:cNvPr id="24" name="TextBox 23"/>
           <p:cNvSpPr txBox="1"/>
           <p:nvPr/>
         </p:nvSpPr>
@@ -5446,7 +5400,7 @@
       </p:sp>
       <p:sp>
         <p:nvSpPr>
-          <p:cNvPr id="26" name="TextBox 25"/>
+          <p:cNvPr id="25" name="TextBox 24"/>
           <p:cNvSpPr txBox="1"/>
           <p:nvPr/>
         </p:nvSpPr>
@@ -5488,7 +5442,7 @@
       </p:sp>
       <p:sp>
         <p:nvSpPr>
-          <p:cNvPr id="27" name="TextBox 26"/>
+          <p:cNvPr id="26" name="TextBox 25"/>
           <p:cNvSpPr txBox="1"/>
           <p:nvPr/>
         </p:nvSpPr>
@@ -5587,7 +5541,7 @@
       </p:sp>
       <p:sp>
         <p:nvSpPr>
-          <p:cNvPr id="28" name="Rectangle 27"/>
+          <p:cNvPr id="27" name="Rectangle 26"/>
           <p:cNvSpPr/>
           <p:nvPr/>
         </p:nvSpPr>
@@ -5630,7 +5584,7 @@
       </p:sp>
       <p:sp>
         <p:nvSpPr>
-          <p:cNvPr id="29" name="Rectangle 28"/>
+          <p:cNvPr id="28" name="Rectangle 27"/>
           <p:cNvSpPr/>
           <p:nvPr/>
         </p:nvSpPr>
@@ -5671,7 +5625,7 @@
       </p:sp>
       <p:sp>
         <p:nvSpPr>
-          <p:cNvPr id="30" name="TextBox 29"/>
+          <p:cNvPr id="29" name="TextBox 28"/>
           <p:cNvSpPr txBox="1"/>
           <p:nvPr/>
         </p:nvSpPr>
@@ -5789,7 +5743,7 @@
       </p:sp>
       <p:sp>
         <p:nvSpPr>
-          <p:cNvPr id="31" name="TextBox 30"/>
+          <p:cNvPr id="30" name="TextBox 29"/>
           <p:cNvSpPr txBox="1"/>
           <p:nvPr/>
         </p:nvSpPr>

--- a/assets/memos/B4-memo.pptx
+++ b/assets/memos/B4-memo.pptx
@@ -4017,7 +4017,7 @@
                 </a:solidFill>
                 <a:latin typeface="Arial"/>
               </a:rPr>
-              <a:t>→ Le site est organisé de manière logique. Voici comment l'utiliser efficacement, étape par étape, même si vous n'êtes pas à l'aise avec Internet.</a:t>
+              <a:t>→ Le site est organisé de manière logique. Voici comment l'utiliser efficacement, étape par étape, même si_x000B_vous n'êtes pas à l'aise avec Internet.</a:t>
             </a:r>
           </a:p>
           <a:p>
@@ -4865,7 +4865,7 @@
                 </a:solidFill>
                 <a:latin typeface="Arial"/>
               </a:rPr>
-              <a:t>→ FranceConnect est un dispositif officiel de l'État qui vous permet de vous connecter à la majorité des services publics en ligne avec un seul identifiant. Plus besoin de retenir des dizaines de mots de passe différents !</a:t>
+              <a:t>→ FranceConnect est un dispositif officiel de l'État qui vous permet de vous connecter à la majorité des services publics en ligne_x000B_avec un seul identifiant. Plus besoin de retenir des dizaines de mots de passe différents !</a:t>
             </a:r>
           </a:p>
           <a:p>
